--- a/outdoor_seld_e2e/md/seminar/図_付録QA用_2026-08-13.pptx
+++ b/outdoor_seld_e2e/md/seminar/図_付録QA用_2026-08-13.pptx
@@ -3345,7 +3345,7 @@
                 <a:latin typeface="Meiryo"/>
                 <a:ea typeface="メイリオ"/>
               </a:rPr>
-              <a:t>録音開始→手拍子1回（時刻同期）→騒音計LAeqを読み上げ1分（絶対較正）→ベル4方位×1打（方位校正）</a:t>
+              <a:t>録音開始→手拍子1回（時刻同期）→騒音計と並べ無言60秒・読み値は計測後にスレート（絶対較正）→ベル4方位×1打（方位校正）</a:t>
             </a:r>
           </a:p>
         </p:txBody>
@@ -4059,7 +4059,7 @@
         <p:spPr>
           <a:xfrm>
             <a:off x="777240" y="4343400"/>
-            <a:ext cx="5486400" cy="365760"/>
+            <a:ext cx="7772400" cy="365760"/>
           </a:xfrm>
           <a:prstGeom prst="rect">
             <a:avLst/>
@@ -4085,7 +4085,7 @@
                 <a:latin typeface="Meiryo"/>
                 <a:ea typeface="メイリオ"/>
               </a:rPr>
-              <a:t>撮れ高 計65本（レンタル1週間・実働2日＋注釈半日）</a:t>
+              <a:t>撮れ高 計65本＋負例は露出時間100分以上（実働2日＋注釈半日）</a:t>
             </a:r>
           </a:p>
         </p:txBody>
@@ -4230,7 +4230,7 @@
                 <a:latin typeface="Meiryo"/>
                 <a:ea typeface="メイリオ"/>
               </a:rPr>
-              <a:t>速度3段×横2〜15mを散らす</a:t>
+              <a:t>速度≤30km/h×横2〜15mを散らす</a:t>
             </a:r>
           </a:p>
         </p:txBody>
@@ -5120,7 +5120,7 @@
                 <a:latin typeface="Meiryo"/>
                 <a:ea typeface="メイリオ"/>
               </a:rPr>
-              <a:t>・方向誤差 中央2.0°、至近距離誤差 0.21m の精密検証はこちらの役割</a:t>
+              <a:t>・方向誤差 中央2.0°（車）、至近距離誤差 0.21m の精密検証はこちらの役割</a:t>
             </a:r>
           </a:p>
           <a:p>
@@ -5358,7 +5358,7 @@
                 </a:solidFill>
                 <a:latin typeface="Consolas"/>
               </a:rPr>
-              <a:t>trial=3, class=車, 象限=右,</a:t>
+              <a:t>trial=3, event=1, class=車, 象限=右,</a:t>
             </a:r>
           </a:p>
           <a:p>
@@ -5550,7 +5550,7 @@
                 <a:latin typeface="Meiryo"/>
                 <a:ea typeface="メイリオ"/>
               </a:rPr>
-              <a:t>フレーム単位の x,y,z・距離を手入力することはない（人間には不可能・設計上も不要）。注釈は1テイク1行×65行＋時刻合わせで半日の作業量</a:t>
+              <a:t>フレーム単位の x,y,z・距離を手入力することはない（人間には不可能・設計上も不要）。注釈は1イベント1行（複数イベントは行を追加）＋時刻合わせで半日の作業量</a:t>
             </a:r>
           </a:p>
         </p:txBody>
@@ -7633,7 +7633,7 @@
                 <a:latin typeface="Meiryo"/>
                 <a:ea typeface="メイリオ"/>
               </a:rPr>
-              <a:t>旧版は出力のtanhで距離が±10mに飽和。監査指摘で「距離だけ線形出力＋log符号化」に修正 → 303m先まで出力でき至近は0.21m精度</a:t>
+              <a:t>旧版は出力のtanhで距離が±10mに飽和。「距離だけ線形出力＋log符号化」に修正し飽和を解消（fold11遠方の開発評価ではGT303mのサイレンを検出。遠距離の距離精度の主張ではない）。至近5m以内は中央0.21m</a:t>
             </a:r>
           </a:p>
         </p:txBody>
@@ -7673,7 +7673,7 @@
                 <a:latin typeface="Meiryo"/>
                 <a:ea typeface="メイリオ"/>
               </a:rPr>
-              <a:t>通知層はこの（クラス・方向・距離）を読み、1.5m×2フレーム連続→至近警告／≤3.0m→注意／&gt;3.2m→抑制 に振り分ける</a:t>
+              <a:t>通知層はこの（クラス・方向・距離）を読み、1.5m×2フレーム連続→至近警告／≤3.0m→注意／&gt;3.2m→抑制 に振り分ける（同一物体は方位連結±60°の近似・完全な追跡ではない）</a:t>
             </a:r>
           </a:p>
         </p:txBody>
@@ -9492,7 +9492,7 @@
                 <a:latin typeface="Meiryo"/>
                 <a:ea typeface="メイリオ"/>
               </a:rPr>
-              <a:t>残る粒度の課題（正直に）：2台同時のフレームで「1台以上検出」99.9%、「2台として分離」は77.7% ＝ 見逃しは無いが完全分離は今後</a:t>
+              <a:t>残る粒度の課題（正直に）：2台同時のフレームで「1台以上検出」99.92%（存在見逃し0.08%）、「2台として分離」は77.7% ＝ 見逃しはほぼ無いが完全分離は今後</a:t>
             </a:r>
           </a:p>
         </p:txBody>

--- a/outdoor_seld_e2e/md/seminar/図_付録QA用_2026-08-13.pptx
+++ b/outdoor_seld_e2e/md/seminar/図_付録QA用_2026-08-13.pptx
@@ -5358,7 +5358,7 @@
                 </a:solidFill>
                 <a:latin typeface="Consolas"/>
               </a:rPr>
-              <a:t>trial=3, event=1, class=車, 象限=右,</a:t>
+              <a:t>trial=3, event_id=1, class=車, 象限=右,</a:t>
             </a:r>
           </a:p>
           <a:p>

--- a/outdoor_seld_e2e/md/seminar/図_付録QA用_2026-08-13.pptx
+++ b/outdoor_seld_e2e/md/seminar/図_付録QA用_2026-08-13.pptx
@@ -4085,7 +4085,7 @@
                 <a:latin typeface="Meiryo"/>
                 <a:ea typeface="メイリオ"/>
               </a:rPr>
-              <a:t>撮れ高 計65本＋負例は露出時間100分以上（実働2日＋注釈半日）</a:t>
+              <a:t>撮れ高 計100本＋静止/歩行対比20本＋負例は露出時間100分以上（実働3日＋注釈1日・計画値）</a:t>
             </a:r>
           </a:p>
         </p:txBody>
@@ -4230,7 +4230,7 @@
                 <a:latin typeface="Meiryo"/>
                 <a:ea typeface="メイリオ"/>
               </a:rPr>
-              <a:t>速度≤30km/h×横2〜15mを散らす</a:t>
+              <a:t>caution帯10・safe帯10（後方6以上）</a:t>
             </a:r>
           </a:p>
         </p:txBody>
@@ -4463,7 +4463,7 @@
                 <a:latin typeface="Meiryo"/>
                 <a:ea typeface="メイリオ"/>
               </a:rPr>
-              <a:t>10本</a:t>
+              <a:t>20本</a:t>
             </a:r>
           </a:p>
         </p:txBody>
@@ -4608,7 +4608,7 @@
                 <a:latin typeface="Meiryo"/>
                 <a:ea typeface="メイリオ"/>
               </a:rPr>
-              <a:t>10本</a:t>
+              <a:t>20本</a:t>
             </a:r>
           </a:p>
         </p:txBody>
@@ -4665,7 +4665,7 @@
                 <a:latin typeface="Meiryo"/>
                 <a:ea typeface="メイリオ"/>
               </a:rPr>
-              <a:t>踏切4＋サイレンは遭遇最優先</a:t>
+              <a:t>踏切8＋バック音統制4＋機会枠8</a:t>
             </a:r>
           </a:p>
         </p:txBody>
@@ -4753,7 +4753,7 @@
                 <a:latin typeface="Meiryo"/>
                 <a:ea typeface="メイリオ"/>
               </a:rPr>
-              <a:t>5本</a:t>
+              <a:t>20本</a:t>
             </a:r>
           </a:p>
         </p:txBody>
@@ -4810,7 +4810,7 @@
                 <a:latin typeface="Meiryo"/>
                 <a:ea typeface="メイリオ"/>
               </a:rPr>
-              <a:t>統制走行</a:t>
+              <a:t>横1.0〜1.5mの至近帯を統制</a:t>
             </a:r>
           </a:p>
         </p:txBody>
